--- a/RELIFE-Un-Projet-NSI-pour-lEnvironnement.pptx
+++ b/RELIFE-Un-Projet-NSI-pour-lEnvironnement.pptx
@@ -31,11 +31,11 @@
       <p:boldItalic r:id="rId17"/>
     </p:embeddedFont>
     <p:embeddedFont>
-      <p:font typeface="Fraunces Extra Bold" panose="020B0604020202020204" charset="0"/>
+      <p:font typeface="Fraunces Extra Bold"/>
       <p:regular r:id="rId18"/>
     </p:embeddedFont>
     <p:embeddedFont>
-      <p:font typeface="Nobile" panose="020B0604020202020204" charset="0"/>
+      <p:font typeface="Nobile"/>
       <p:regular r:id="rId19"/>
     </p:embeddedFont>
   </p:embeddedFontLst>
@@ -6848,7 +6848,7 @@
                 <a:ea typeface="Consolas" pitchFamily="34" charset="-122"/>
                 <a:cs typeface="Consolas" pitchFamily="34" charset="-120"/>
               </a:rPr>
-              <a:t>classe_tilr.py</a:t>
+              <a:t>classe_tile.py</a:t>
             </a:r>
             <a:endParaRPr lang="en-US" sz="1550" dirty="0"/>
           </a:p>
@@ -7086,7 +7086,7 @@
                 <a:ea typeface="Nobile" pitchFamily="34" charset="-122"/>
                 <a:cs typeface="Nobile" pitchFamily="34" charset="-120"/>
               </a:rPr>
-              <a:t>menu.py</a:t>
+              <a:t>Interface_principal.py</a:t>
             </a:r>
             <a:r>
               <a:rPr lang="en-US" sz="1250" dirty="0">
@@ -7376,18 +7376,19 @@
                 <a:ea typeface="Nobile" pitchFamily="34" charset="-122"/>
                 <a:cs typeface="Nobile" pitchFamily="34" charset="-120"/>
               </a:rPr>
-              <a:t>Facilite les modifications et l'ajout de nouvelles fonctionnalités.</a:t>
-            </a:r>
-            <a:endParaRPr lang="en-US" sz="1250" dirty="0"/>
-          </a:p>
-          <a:p>
-            <a:pPr marL="342900" indent="-342900" algn="l">
-              <a:lnSpc>
-                <a:spcPts val="1700"/>
-              </a:lnSpc>
-              <a:buSzPct val="100000"/>
-              <a:buChar char="•"/>
-            </a:pPr>
+              <a:t>Facilite les modifications et l'ajout de nouvelles </a:t>
+            </a:r>
+            <a:r>
+              <a:rPr lang="en-US" sz="1250" dirty="0" err="1">
+                <a:solidFill>
+                  <a:srgbClr val="405449"/>
+                </a:solidFill>
+                <a:latin typeface="Nobile" pitchFamily="34" charset="0"/>
+                <a:ea typeface="Nobile" pitchFamily="34" charset="-122"/>
+                <a:cs typeface="Nobile" pitchFamily="34" charset="-120"/>
+              </a:rPr>
+              <a:t>fonctionnalités</a:t>
+            </a:r>
             <a:r>
               <a:rPr lang="en-US" sz="1250" dirty="0">
                 <a:solidFill>
@@ -7397,7 +7398,7 @@
                 <a:ea typeface="Nobile" pitchFamily="34" charset="-122"/>
                 <a:cs typeface="Nobile" pitchFamily="34" charset="-120"/>
               </a:rPr>
-              <a:t>Respect des principes de la Programmation Orientée Objet.</a:t>
+              <a:t>.</a:t>
             </a:r>
             <a:endParaRPr lang="en-US" sz="1250" dirty="0"/>
           </a:p>
@@ -8979,7 +8980,7 @@
                 <a:ea typeface="Nobile" pitchFamily="34" charset="-122"/>
                 <a:cs typeface="Nobile" pitchFamily="34" charset="-120"/>
               </a:rPr>
-              <a:t>Les tuiles ont une taille fixe (64x64 pixels) pour une cohérence visuelle.</a:t>
+              <a:t>Les tuiles ont une taille fixe (8x8 pixels) pour une cohérence visuelle.</a:t>
             </a:r>
             <a:endParaRPr lang="en-US" sz="1250" dirty="0"/>
           </a:p>
@@ -9578,7 +9579,7 @@
         </p:nvSpPr>
         <p:spPr>
           <a:xfrm>
-            <a:off x="9590484" y="4270653"/>
+            <a:off x="9590485" y="3777317"/>
             <a:ext cx="4246126" cy="1837373"/>
           </a:xfrm>
           <a:prstGeom prst="rect">
